--- a/public/fun/pack/pptx/newspro/카드뉴스프리미엄_06_알뜰생활팁_민트플래티넘.pptx
+++ b/public/fun/pack/pptx/newspro/카드뉴스프리미엄_06_알뜰생활팁_민트플래티넘.pptx
@@ -113,12 +113,12 @@
   <p:extLst>
     <p:ext uri="{521415D9-36F7-43E2-AB2F-B90AF26B5E84}">
       <p14:sectionLst xmlns:p14="http://schemas.microsoft.com/office/powerpoint/2010/main">
-        <p14:section name="시작" id="{F7E0C046-2F0E-4EF8-BF11-99D397F7A7E1}">
+        <p14:section name="시작" id="{925124B7-0A00-408B-92EA-38491D381CE9}">
           <p14:sldIdLst>
             <p14:sldId id="256"/>
           </p14:sldIdLst>
         </p14:section>
-        <p14:section name="본문" id="{1449232E-ED00-4642-B01F-BB1C904D3987}">
+        <p14:section name="본문" id="{0F01D785-C664-4082-94AB-A63595771C57}">
           <p14:sldIdLst>
             <p14:sldId id="257"/>
             <p14:sldId id="258"/>
@@ -127,7 +127,7 @@
             <p14:sldId id="261"/>
           </p14:sldIdLst>
         </p14:section>
-        <p14:section name="마무리" id="{C2B27F38-09CF-483E-BA44-A59DAEB9D808}">
+        <p14:section name="마무리" id="{D03696C2-0F4D-4228-9118-3C0C54F444A0}">
           <p14:sldIdLst>
             <p14:sldId id="262"/>
           </p14:sldIdLst>
@@ -1508,7 +1508,7 @@
             </a:lvl1pPr>
           </a:lstStyle>
           <a:p>
-            <a:fld id="{16C71003-AEB3-494B-B614-3BDE354BE234}" type="slidenum">
+            <a:fld id="{88FA207F-3B16-40EB-B82C-39AEC4F3B93C}" type="slidenum">
               <a:rPr lang="en-US"/>
               <a:t>‹#›</a:t>
             </a:fld>
@@ -2194,7 +2194,7 @@
             </a:lvl1pPr>
           </a:lstStyle>
           <a:p>
-            <a:fld id="{EF83B9A4-5C94-423E-968A-B068AD01D143}" type="slidenum">
+            <a:fld id="{9FD443E4-9F85-4701-A1AD-B2222A0C66A3}" type="slidenum">
               <a:rPr lang="en-US"/>
               <a:t>‹#›</a:t>
             </a:fld>
@@ -2882,7 +2882,7 @@
             </a:lvl1pPr>
           </a:lstStyle>
           <a:p>
-            <a:fld id="{A459083D-D8A8-4F84-BA93-488FCF5FA9D9}" type="slidenum">
+            <a:fld id="{B117815F-55E4-4B5C-A911-EFC9362680CB}" type="slidenum">
               <a:rPr lang="en-US"/>
               <a:t>‹#›</a:t>
             </a:fld>
@@ -3771,7 +3771,7 @@
           <a:p>
             <a:r>
               <a:rPr lang="ko-KR"/>
-              <a:t>이번 달 고정지출, 한 번 적어 보세요</a:t>
+              <a:t>고정지출, 한 번 적어 보세요</a:t>
             </a:r>
           </a:p>
         </p:txBody>
@@ -3900,7 +3900,7 @@
           <a:bodyPr/>
           <a:lstStyle/>
           <a:p>
-            <a:fld id="{0DDD9C6B-8562-428A-9444-389052BEF94B}" type="slidenum">
+            <a:fld id="{BCCECD6C-5EF6-4728-91E5-FA0D705497C3}" type="slidenum">
               <a:rPr lang="en-US"/>
               <a:t>‹#›</a:t>
             </a:fld>
@@ -4066,7 +4066,7 @@
           <a:bodyPr/>
           <a:lstStyle/>
           <a:p>
-            <a:fld id="{3BAC52DF-8465-4A7B-83E3-E0F43FF85192}" type="slidenum">
+            <a:fld id="{32F2BE99-667C-4D09-9397-D25F85D9751C}" type="slidenum">
               <a:rPr lang="en-US"/>
               <a:t>‹#›</a:t>
             </a:fld>
@@ -4232,7 +4232,7 @@
           <a:bodyPr/>
           <a:lstStyle/>
           <a:p>
-            <a:fld id="{1074AD94-D36D-46E3-A707-48410C2290E9}" type="slidenum">
+            <a:fld id="{39012745-E522-4BE5-BA97-063F4EA52C52}" type="slidenum">
               <a:rPr lang="en-US"/>
               <a:t>‹#›</a:t>
             </a:fld>
@@ -4398,7 +4398,7 @@
           <a:bodyPr/>
           <a:lstStyle/>
           <a:p>
-            <a:fld id="{A6632477-6976-4011-9E24-C3A520D8CF74}" type="slidenum">
+            <a:fld id="{5631426F-5C4F-4046-88D9-B0BD356485A8}" type="slidenum">
               <a:rPr lang="en-US"/>
               <a:t>‹#›</a:t>
             </a:fld>
@@ -4564,7 +4564,7 @@
           <a:bodyPr/>
           <a:lstStyle/>
           <a:p>
-            <a:fld id="{59F0DA64-AA66-45AA-B69C-2D285F583B1C}" type="slidenum">
+            <a:fld id="{59028E2F-D684-401B-BA1C-020022C6BEE8}" type="slidenum">
               <a:rPr lang="en-US"/>
               <a:t>‹#›</a:t>
             </a:fld>
